--- a/docs/content/probability_inference/probability_inference_lecture.pptx
+++ b/docs/content/probability_inference/probability_inference_lecture.pptx
@@ -10415,8 +10415,8 @@
         </p:blipFill>
         <p:spPr bwMode="auto">
           <a:xfrm>
-            <a:off x="6121400" y="1498600"/>
-            <a:ext cx="2781300" cy="2781300"/>
+            <a:off x="6121400" y="1917700"/>
+            <a:ext cx="2781300" cy="1943100"/>
           </a:xfrm>
           <a:prstGeom prst="rect">
             <a:avLst/>
@@ -10741,8 +10741,8 @@
         </p:blipFill>
         <p:spPr bwMode="auto">
           <a:xfrm>
-            <a:off x="6121400" y="1498600"/>
-            <a:ext cx="2781300" cy="2781300"/>
+            <a:off x="6121400" y="1917700"/>
+            <a:ext cx="2781300" cy="1943100"/>
           </a:xfrm>
           <a:prstGeom prst="rect">
             <a:avLst/>
@@ -12402,7 +12402,69 @@
             </a:r>
             <a:r>
               <a:rPr/>
-              <a:t> gives the probability of each possible outcome.</a:t>
+              <a:t> spreads probability across the possible outcomes — but </a:t>
+            </a:r>
+            <a:r>
+              <a:rPr i="1"/>
+              <a:t>how</a:t>
+            </a:r>
+            <a:r>
+              <a:rPr/>
+              <a:t> depends on the data:</a:t>
+            </a:r>
+          </a:p>
+          <a:p>
+            <a:pPr lvl="0"/>
+            <a:r>
+              <a:rPr b="1"/>
+              <a:t>Discrete</a:t>
+            </a:r>
+            <a:r>
+              <a:rPr/>
+              <a:t> (a die): each outcome has its own probability, P(4) = 1/6</a:t>
+            </a:r>
+          </a:p>
+          <a:p>
+            <a:pPr lvl="0"/>
+            <a:r>
+              <a:rPr b="1"/>
+              <a:t>Continuous</a:t>
+            </a:r>
+            <a:r>
+              <a:rPr/>
+              <a:t> (fish length): any </a:t>
+            </a:r>
+            <a:r>
+              <a:rPr i="1"/>
+              <a:t>exact</a:t>
+            </a:r>
+            <a:r>
+              <a:rPr/>
+              <a:t> value has probability </a:t>
+            </a:r>
+            <a:r>
+              <a:rPr b="1"/>
+              <a:t>zero</a:t>
+            </a:r>
+            <a:r>
+              <a:rPr/>
+              <a:t>. Probability lives in </a:t>
+            </a:r>
+            <a:r>
+              <a:rPr b="1"/>
+              <a:t>ranges</a:t>
+            </a:r>
+            <a:r>
+              <a:rPr/>
+              <a:t>, as </a:t>
+            </a:r>
+            <a:r>
+              <a:rPr b="1"/>
+              <a:t>area</a:t>
+            </a:r>
+            <a:r>
+              <a:rPr/>
+              <a:t> under the curve</a:t>
             </a:r>
           </a:p>
           <a:p>
@@ -12411,55 +12473,95 @@
             </a:pPr>
             <a:r>
               <a:rPr/>
+              <a:t>The curve’s height is a </a:t>
+            </a:r>
+            <a:r>
+              <a:rPr b="1"/>
+              <a:t>density</a:t>
+            </a:r>
+            <a:r>
+              <a:rPr/>
+              <a:t> — probability </a:t>
+            </a:r>
+            <a:r>
+              <a:rPr i="1"/>
+              <a:t>per mm</a:t>
+            </a:r>
+            <a:r>
+              <a:rPr/>
+              <a:t>, not a probability. </a:t>
+            </a:r>
+            <a:r>
+              <a:rPr b="1"/>
+              <a:t>Density × width ≈ probability.</a:t>
+            </a:r>
+          </a:p>
+          <a:p>
+            <a:pPr lvl="0" indent="0" marL="1270000">
+              <a:buNone/>
+            </a:pPr>
+            <a:r>
+              <a:rPr sz="2000"/>
+              <a:t>Density is a </a:t>
+            </a:r>
+            <a:r>
+              <a:rPr sz="2000" b="1"/>
+              <a:t>rate</a:t>
+            </a:r>
+            <a:r>
+              <a:rPr sz="2000"/>
+              <a:t>, so it is not capped at 1: </a:t>
+            </a:r>
+            <a:r>
+              <a:rPr sz="2000">
+                <a:latin typeface="Courier"/>
+              </a:rPr>
+              <a:t>dnorm(0, sd = 0.1)</a:t>
+            </a:r>
+            <a:r>
+              <a:rPr sz="2000"/>
+              <a:t> = </a:t>
+            </a:r>
+            <a:r>
+              <a:rPr sz="2000" b="1"/>
+              <a:t>3.989</a:t>
+            </a:r>
+            <a:r>
+              <a:rPr sz="2000"/>
+              <a:t>. Nothing is 399% likely — proof that height ≠ probability.</a:t>
+            </a:r>
+          </a:p>
+          <a:p>
+            <a:pPr lvl="0" indent="0" marL="0">
+              <a:buNone/>
+            </a:pPr>
+            <a:r>
+              <a:rPr/>
               <a:t>The </a:t>
             </a:r>
             <a:r>
               <a:rPr b="1"/>
-              <a:t>normal distribution</a:t>
-            </a:r>
-            <a:r>
-              <a:rPr/>
-              <a:t> is the one we lean on:</a:t>
-            </a:r>
-          </a:p>
-          <a:p>
-            <a:pPr lvl="0"/>
-            <a:r>
-              <a:rPr/>
-              <a:t>Symmetric, bell-shaped, defined by exactly </a:t>
-            </a:r>
-            <a:r>
-              <a:rPr b="1"/>
-              <a:t>two numbers</a:t>
-            </a:r>
-          </a:p>
-          <a:p>
-            <a:pPr lvl="0"/>
+              <a:t>normal</a:t>
+            </a:r>
+            <a:r>
+              <a:rPr/>
+              <a:t> is the density we lean on: symmetric, fixed by </a:t>
+            </a:r>
             <a:r>
               <a:rPr b="1"/>
               <a:t>μ</a:t>
             </a:r>
             <a:r>
               <a:rPr/>
-              <a:t> sets where the curve sits</a:t>
-            </a:r>
-          </a:p>
-          <a:p>
-            <a:pPr lvl="0"/>
+              <a:t> (where it sits) and </a:t>
+            </a:r>
             <a:r>
               <a:rPr b="1"/>
               <a:t>σ</a:t>
             </a:r>
             <a:r>
               <a:rPr/>
-              <a:t> sets how wide it is</a:t>
-            </a:r>
-          </a:p>
-          <a:p>
-            <a:pPr lvl="0"/>
-            <a:r>
-              <a:rPr/>
-              <a:t>Area under the whole curve = 1</a:t>
+              <a:t> (how wide), total area 1.</a:t>
             </a:r>
           </a:p>
           <a:p>
@@ -12468,7 +12570,7 @@
             </a:pPr>
             <a:r>
               <a:rPr/>
-              <a:t>Lake I3 grayling: </a:t>
+              <a:t>Lake I3: </a:t>
             </a:r>
             <a:r>
               <a:rPr b="1"/>
@@ -12484,16 +12586,7 @@
             </a:r>
             <a:r>
               <a:rPr/>
-              <a:t>.</a:t>
-            </a:r>
-          </a:p>
-          <a:p>
-            <a:pPr lvl="0" indent="0" marL="0">
-              <a:buNone/>
-            </a:pPr>
-            <a:r>
-              <a:rPr/>
-              <a:t>That is a normal curve — but it is </a:t>
+              <a:t> — </a:t>
             </a:r>
             <a:r>
               <a:rPr i="1"/>
@@ -12501,7 +12594,7 @@
             </a:r>
             <a:r>
               <a:rPr/>
-              <a:t> normal curve. Every dataset has a different one.</a:t>
+              <a:t> curve. Every dataset has its own.</a:t>
             </a:r>
           </a:p>
           <a:p>
@@ -13445,22 +13538,30 @@
           <a:p>
             <a:pPr lvl="0"/>
             <a:r>
-              <a:rPr/>
-              <a:t>Left histogram: millimetres, centred near 266</a:t>
+              <a:rPr b="1"/>
+              <a:t>Top</a:t>
+            </a:r>
+            <a:r>
+              <a:rPr/>
+              <a:t>: millimetres, centred near 266</a:t>
             </a:r>
           </a:p>
           <a:p>
             <a:pPr lvl="0"/>
             <a:r>
-              <a:rPr/>
-              <a:t>Right histogram: z, centred at 0</a:t>
+              <a:rPr b="1"/>
+              <a:t>Bottom</a:t>
+            </a:r>
+            <a:r>
+              <a:rPr/>
+              <a:t>: z, centred at 0</a:t>
             </a:r>
           </a:p>
           <a:p>
             <a:pPr lvl="0"/>
             <a:r>
               <a:rPr/>
-              <a:t>Same fish, same skew, same everything</a:t>
+              <a:t>Same fish, same bars, same skew — only the ruler changed</a:t>
             </a:r>
           </a:p>
           <a:p>
